--- a/deck/OneRecord_Finals.pptx
+++ b/deck/OneRecord_Finals.pptx
@@ -134,7 +134,7 @@
   <p:extLst>
     <p:ext uri="{521415D9-36F7-43E2-AB2F-B90AF26B5E84}">
       <p14:sectionLst xmlns:p14="http://schemas.microsoft.com/office/powerpoint/2010/main">
-        <p14:section name="1 · The problem (Megan)" id="{8ad39401-8952-dfb6-d20a-b483b798f124}">
+        <p14:section name="1 · The problem (Megan)" id="{a9d7cac0-4b04-35c4-bf99-45f3d50d909c}">
           <p14:sldIdLst>
             <p14:sldId id="256"/>
             <p14:sldId id="257"/>
@@ -144,7 +144,7 @@
             <p14:sldId id="261"/>
           </p14:sldIdLst>
         </p14:section>
-        <p14:section name="2 · OneRecord (Zacchaeus)" id="{ce865c14-c694-a804-19ee-37f56c59b338}">
+        <p14:section name="2 · OneRecord (Zacchaeus)" id="{1152b368-bbef-ce2c-81b2-e9d8dbb63524}">
           <p14:sldIdLst>
             <p14:sldId id="262"/>
             <p14:sldId id="263"/>
@@ -155,7 +155,7 @@
             <p14:sldId id="268"/>
           </p14:sldIdLst>
         </p14:section>
-        <p14:section name="3 · Regional view (Darryl)" id="{36b712ad-9fe4-2e40-9f9a-8ef8e48be26e}">
+        <p14:section name="3 · Regional view (Darryl)" id="{c6890836-c933-5ddf-d1a1-6dba9cac0ad4}">
           <p14:sldIdLst>
             <p14:sldId id="269"/>
             <p14:sldId id="270"/>
@@ -164,7 +164,7 @@
             <p14:sldId id="273"/>
           </p14:sldIdLst>
         </p14:section>
-        <p14:section name="4 · Making it real (Chloe)" id="{cd14a52c-2abc-1957-d9d6-d906a95aa6d8}">
+        <p14:section name="4 · Making it real (Chloe)" id="{e01b3e21-2108-7e2e-39fe-b08e11ac0234}">
           <p14:sldIdLst>
             <p14:sldId id="274"/>
             <p14:sldId id="275"/>
@@ -173,7 +173,7 @@
             <p14:sldId id="278"/>
           </p14:sldIdLst>
         </p14:section>
-        <p14:section name="Appendix (Q&amp;A backup)" id="{326423a3-5a4e-0444-bcd4-7e931bc0caf0}">
+        <p14:section name="Appendix (Q&amp;A backup)" id="{2b78ba29-5c6e-2208-5f2d-c9eb4a13ff75}">
           <p14:sldIdLst>
             <p14:sldId id="279"/>
             <p14:sldId id="280"/>
@@ -762,7 +762,7 @@
           <a:p>
             <a:r>
               <a:rPr lang="en-US" dirty="0"/>
-              <a:t>ZACCHAEUS (0:45). [click] Amy submits. [click] Every approver gets their card at the same time, in Teams. [click] Priya approves last, and the flow writes the SAP import file. [click] And if someone doesn't answer: a reminder at 9 AM in their own time zone, then escalation after four days. Amy can see who it's waiting on.</a:t>
+              <a:t>ZACCHAEUS (0:45). [click] Amy submits. [click] Every approver gets their card at the same time, in Teams. [click] Priya approves last, and the flow writes the SAP import file. [click] And if someone doesn't answer: a reminder at 9 AM in their own time zone, then escalation after four days. Amy can see who it's waiting on. [click] And for audit: every approval, from submission to SAP, is logged with who and when. Bank details sit in a locked list, so they never appear on the approval card.</a:t>
             </a:r>
             <a:endParaRPr lang="en-US" dirty="0"/>
           </a:p>
@@ -5183,8 +5183,8 @@
         </p:nvSpPr>
         <p:spPr>
           <a:xfrm>
-            <a:off x="8001000" y="4846320"/>
-            <a:ext cx="3657600" cy="914400"/>
+            <a:off x="8001000" y="4800600"/>
+            <a:ext cx="3657600" cy="548640"/>
           </a:xfrm>
           <a:prstGeom prst="rect">
             <a:avLst/>
@@ -5200,7 +5200,7 @@
               <a:buNone/>
             </a:pPr>
             <a:r>
-              <a:rPr lang="en-US" sz="1400" b="1" dirty="0">
+              <a:rPr lang="en-US" sz="1300" b="1" dirty="0">
                 <a:solidFill>
                   <a:srgbClr val="E4572E"/>
                 </a:solidFill>
@@ -5211,14 +5211,65 @@
               <a:buNone/>
             </a:pPr>
             <a:r>
-              <a:rPr lang="en-US" sz="1400" dirty="0">
+              <a:rPr lang="en-US" sz="1300" dirty="0">
                 <a:solidFill>
                   <a:schemeClr val="tx1"/>
                 </a:solidFill>
               </a:rPr>
               <a:t>QA → BU Head → Business Support, a few days each</a:t>
             </a:r>
-            <a:endParaRPr lang="en-US" sz="1400" dirty="0"/>
+            <a:endParaRPr lang="en-US" sz="1300" dirty="0"/>
+          </a:p>
+        </p:txBody>
+      </p:sp>
+      <p:sp>
+        <p:nvSpPr>
+          <p:cNvPr id="23" name="anim5_0_75"/>
+          <p:cNvSpPr/>
+          <p:nvPr/>
+        </p:nvSpPr>
+        <p:spPr>
+          <a:xfrm>
+            <a:off x="8001000" y="5440680"/>
+            <a:ext cx="3657600" cy="777240"/>
+          </a:xfrm>
+          <a:prstGeom prst="roundRect">
+            <a:avLst>
+              <a:gd name="adj" fmla="val 17647"/>
+            </a:avLst>
+          </a:prstGeom>
+          <a:solidFill>
+            <a:srgbClr val="0C2F3B"/>
+          </a:solidFill>
+          <a:ln/>
+        </p:spPr>
+        <p:txBody>
+          <a:bodyPr wrap="square" lIns="1524" tIns="1524" rIns="1524" bIns="1524" rtlCol="0" anchor="ctr"/>
+          <a:lstStyle/>
+          <a:p>
+            <a:pPr indent="0" marL="0">
+              <a:buNone/>
+            </a:pPr>
+            <a:r>
+              <a:rPr lang="en-US" sz="1300" b="1" dirty="0">
+                <a:solidFill>
+                  <a:srgbClr val="8ACFC4"/>
+                </a:solidFill>
+              </a:rPr>
+              <a:t>Audit-ready: </a:t>
+            </a:r>
+            <a:pPr indent="0" marL="0">
+              <a:buNone/>
+            </a:pPr>
+            <a:r>
+              <a:rPr lang="en-US" sz="1300" dirty="0">
+                <a:solidFill>
+                  <a:srgbClr val="FFFFFF"/>
+                </a:solidFill>
+              </a:rPr>
+              <a:t>every approval is logged. Bank details never appear on the card</a:t>
+            </a:r>
+            <a:endParaRPr lang="en-US" sz="1300" dirty="0"/>
           </a:p>
         </p:txBody>
       </p:sp>
@@ -6043,6 +6094,59 @@
                                         <p:cTn id="68" dur="400"/>
                                         <p:tgtEl>
                                           <p:spTgt spid="22"/>
+                                        </p:tgtEl>
+                                      </p:cBhvr>
+                                    </p:animEffect>
+                                  </p:childTnLst>
+                                </p:cTn>
+                              </p:par>
+                            </p:childTnLst>
+                          </p:cTn>
+                        </p:par>
+                      </p:childTnLst>
+                    </p:cTn>
+                  </p:par>
+                  <p:par>
+                    <p:cTn id="75" fill="hold">
+                      <p:stCondLst>
+                        <p:cond delay="indefinite"/>
+                      </p:stCondLst>
+                      <p:childTnLst>
+                        <p:par>
+                          <p:cTn id="74" fill="hold">
+                            <p:stCondLst>
+                              <p:cond delay="0"/>
+                            </p:stCondLst>
+                            <p:childTnLst>
+                              <p:par>
+                                <p:cTn id="71" presetID="10" presetClass="entr" presetSubtype="0" fill="hold" grpId="0" nodeType="clickEffect">
+                                  <p:stCondLst>
+                                    <p:cond delay="0"/>
+                                  </p:stCondLst>
+                                  <p:childTnLst>
+                                    <p:set>
+                                      <p:cBhvr>
+                                        <p:cTn id="72" dur="1" fill="hold">
+                                          <p:stCondLst>
+                                            <p:cond delay="0"/>
+                                          </p:stCondLst>
+                                        </p:cTn>
+                                        <p:tgtEl>
+                                          <p:spTgt spid="23"/>
+                                        </p:tgtEl>
+                                        <p:attrNameLst>
+                                          <p:attrName>style.visibility</p:attrName>
+                                        </p:attrNameLst>
+                                      </p:cBhvr>
+                                      <p:to>
+                                        <p:strVal val="visible"/>
+                                      </p:to>
+                                    </p:set>
+                                    <p:animEffect transition="in" filter="fade">
+                                      <p:cBhvr>
+                                        <p:cTn id="73" dur="400"/>
+                                        <p:tgtEl>
+                                          <p:spTgt spid="23"/>
                                         </p:tgtEl>
                                       </p:cBhvr>
                                     </p:animEffect>
@@ -6097,6 +6201,7 @@
       <p:bldP spid="20" grpId="0" animBg="1"/>
       <p:bldP spid="21" grpId="0" animBg="1"/>
       <p:bldP spid="22" grpId="0" animBg="1"/>
+      <p:bldP spid="23" grpId="0" animBg="1"/>
     </p:bldLst>
   </p:timing>
 </p:sld>
@@ -6159,7 +6264,7 @@
       </p:sp>
       <p:sp>
         <p:nvSpPr>
-          <p:cNvPr id="3" name="VIDEO-02_75"/>
+          <p:cNvPr id="3" name="VIDEO-02_76"/>
           <p:cNvSpPr/>
           <p:nvPr/>
         </p:nvSpPr>
@@ -6218,7 +6323,7 @@
       </p:sp>
       <p:sp>
         <p:nvSpPr>
-          <p:cNvPr id="4" name="anim1_0_76"/>
+          <p:cNvPr id="4" name="anim1_0_77"/>
           <p:cNvSpPr/>
           <p:nvPr/>
         </p:nvSpPr>
@@ -6256,7 +6361,7 @@
       </p:sp>
       <p:sp>
         <p:nvSpPr>
-          <p:cNvPr id="5" name="anim1_0_76"/>
+          <p:cNvPr id="5" name="anim1_0_77"/>
           <p:cNvSpPr txBox="1"/>
           <p:nvPr/>
         </p:nvSpPr>
@@ -6292,7 +6397,7 @@
       </p:sp>
       <p:sp>
         <p:nvSpPr>
-          <p:cNvPr id="6" name="anim2_0_77"/>
+          <p:cNvPr id="6" name="anim2_0_78"/>
           <p:cNvSpPr/>
           <p:nvPr/>
         </p:nvSpPr>
@@ -6330,7 +6435,7 @@
       </p:sp>
       <p:sp>
         <p:nvSpPr>
-          <p:cNvPr id="7" name="anim2_0_77"/>
+          <p:cNvPr id="7" name="anim2_0_78"/>
           <p:cNvSpPr txBox="1"/>
           <p:nvPr/>
         </p:nvSpPr>
@@ -6366,7 +6471,7 @@
       </p:sp>
       <p:sp>
         <p:nvSpPr>
-          <p:cNvPr id="8" name="anim3_0_78"/>
+          <p:cNvPr id="8" name="anim3_0_79"/>
           <p:cNvSpPr/>
           <p:nvPr/>
         </p:nvSpPr>
@@ -6404,7 +6509,7 @@
       </p:sp>
       <p:sp>
         <p:nvSpPr>
-          <p:cNvPr id="9" name="anim3_0_78"/>
+          <p:cNvPr id="9" name="anim3_0_79"/>
           <p:cNvSpPr txBox="1"/>
           <p:nvPr/>
         </p:nvSpPr>
@@ -6440,7 +6545,7 @@
       </p:sp>
       <p:sp>
         <p:nvSpPr>
-          <p:cNvPr id="10" name="anim4_0_79"/>
+          <p:cNvPr id="10" name="anim4_0_80"/>
           <p:cNvSpPr/>
           <p:nvPr/>
         </p:nvSpPr>
@@ -6478,7 +6583,7 @@
       </p:sp>
       <p:sp>
         <p:nvSpPr>
-          <p:cNvPr id="11" name="anim4_0_79"/>
+          <p:cNvPr id="11" name="anim4_0_80"/>
           <p:cNvSpPr txBox="1"/>
           <p:nvPr/>
         </p:nvSpPr>
@@ -7017,7 +7122,7 @@
       </p:sp>
       <p:sp>
         <p:nvSpPr>
-          <p:cNvPr id="3" name="ring_80"/>
+          <p:cNvPr id="3" name="ring_81"/>
           <p:cNvSpPr/>
           <p:nvPr/>
         </p:nvSpPr>
@@ -7041,7 +7146,7 @@
       </p:sp>
       <p:sp>
         <p:nvSpPr>
-          <p:cNvPr id="4" name="ring_81"/>
+          <p:cNvPr id="4" name="ring_82"/>
           <p:cNvSpPr/>
           <p:nvPr/>
         </p:nvSpPr>
@@ -7065,7 +7170,7 @@
       </p:sp>
       <p:sp>
         <p:nvSpPr>
-          <p:cNvPr id="5" name="SHOT-05_82"/>
+          <p:cNvPr id="5" name="SHOT-05_83"/>
           <p:cNvSpPr/>
           <p:nvPr/>
         </p:nvSpPr>
@@ -7122,7 +7227,7 @@
       </p:sp>
       <p:sp>
         <p:nvSpPr>
-          <p:cNvPr id="6" name="anim1_0_83"/>
+          <p:cNvPr id="6" name="anim1_0_84"/>
           <p:cNvSpPr/>
           <p:nvPr/>
         </p:nvSpPr>
@@ -7160,7 +7265,7 @@
       </p:sp>
       <p:sp>
         <p:nvSpPr>
-          <p:cNvPr id="7" name="anim1_0_83"/>
+          <p:cNvPr id="7" name="anim1_0_84"/>
           <p:cNvSpPr txBox="1"/>
           <p:nvPr/>
         </p:nvSpPr>
@@ -7210,7 +7315,7 @@
       </p:sp>
       <p:sp>
         <p:nvSpPr>
-          <p:cNvPr id="8" name="anim2_0_84"/>
+          <p:cNvPr id="8" name="anim2_0_85"/>
           <p:cNvSpPr/>
           <p:nvPr/>
         </p:nvSpPr>
@@ -7248,7 +7353,7 @@
       </p:sp>
       <p:sp>
         <p:nvSpPr>
-          <p:cNvPr id="9" name="anim2_0_84"/>
+          <p:cNvPr id="9" name="anim2_0_85"/>
           <p:cNvSpPr txBox="1"/>
           <p:nvPr/>
         </p:nvSpPr>
@@ -7298,7 +7403,7 @@
       </p:sp>
       <p:sp>
         <p:nvSpPr>
-          <p:cNvPr id="10" name="anim3_0_85"/>
+          <p:cNvPr id="10" name="anim3_0_86"/>
           <p:cNvSpPr/>
           <p:nvPr/>
         </p:nvSpPr>
@@ -7336,7 +7441,7 @@
       </p:sp>
       <p:sp>
         <p:nvSpPr>
-          <p:cNvPr id="11" name="anim3_0_85"/>
+          <p:cNvPr id="11" name="anim3_0_86"/>
           <p:cNvSpPr txBox="1"/>
           <p:nvPr/>
         </p:nvSpPr>
@@ -7386,7 +7491,7 @@
       </p:sp>
       <p:sp>
         <p:nvSpPr>
-          <p:cNvPr id="12" name="anim4_0_86"/>
+          <p:cNvPr id="12" name="anim4_0_87"/>
           <p:cNvSpPr txBox="1"/>
           <p:nvPr/>
         </p:nvSpPr>
@@ -7862,7 +7967,7 @@
       </p:grpSpPr>
       <p:sp>
         <p:nvSpPr>
-          <p:cNvPr id="2" name="dot_87"/>
+          <p:cNvPr id="2" name="dot_88"/>
           <p:cNvSpPr/>
           <p:nvPr/>
         </p:nvSpPr>
@@ -7990,7 +8095,7 @@
       </p:sp>
       <p:sp>
         <p:nvSpPr>
-          <p:cNvPr id="5" name="ring_88"/>
+          <p:cNvPr id="5" name="ring_89"/>
           <p:cNvSpPr/>
           <p:nvPr/>
         </p:nvSpPr>
@@ -8014,7 +8119,7 @@
       </p:sp>
       <p:sp>
         <p:nvSpPr>
-          <p:cNvPr id="6" name="ring_89"/>
+          <p:cNvPr id="6" name="ring_90"/>
           <p:cNvSpPr/>
           <p:nvPr/>
         </p:nvSpPr>
@@ -8038,7 +8143,7 @@
       </p:sp>
       <p:pic>
         <p:nvPicPr>
-          <p:cNvPr id="7" name="circleimg_90" descr="Growth heatmap by country and product">    </p:cNvPr>
+          <p:cNvPr id="7" name="circleimg_91" descr="Growth heatmap by country and product">    </p:cNvPr>
           <p:cNvPicPr>
             <a:picLocks noChangeAspect="1"/>
           </p:cNvPicPr>
@@ -8288,7 +8393,7 @@
       </p:sp>
       <p:pic>
         <p:nvPicPr>
-          <p:cNvPr id="3" name="overview_91" descr="OneRecord overview page">    </p:cNvPr>
+          <p:cNvPr id="3" name="overview_92" descr="OneRecord overview page">    </p:cNvPr>
           <p:cNvPicPr>
             <a:picLocks noChangeAspect="1"/>
           </p:cNvPicPr>
@@ -8312,7 +8417,7 @@
       </p:pic>
       <p:sp>
         <p:nvSpPr>
-          <p:cNvPr id="4" name="anim1_0_92"/>
+          <p:cNvPr id="4" name="anim1_0_93"/>
           <p:cNvSpPr/>
           <p:nvPr/>
         </p:nvSpPr>
@@ -8350,7 +8455,7 @@
       </p:sp>
       <p:sp>
         <p:nvSpPr>
-          <p:cNvPr id="5" name="anim1_0_92"/>
+          <p:cNvPr id="5" name="anim1_0_93"/>
           <p:cNvSpPr/>
           <p:nvPr/>
         </p:nvSpPr>
@@ -8388,7 +8493,7 @@
       </p:sp>
       <p:sp>
         <p:nvSpPr>
-          <p:cNvPr id="6" name="anim1_0_92"/>
+          <p:cNvPr id="6" name="anim1_0_93"/>
           <p:cNvSpPr txBox="1"/>
           <p:nvPr/>
         </p:nvSpPr>
@@ -8438,7 +8543,7 @@
       </p:sp>
       <p:sp>
         <p:nvSpPr>
-          <p:cNvPr id="7" name="anim2_0_93"/>
+          <p:cNvPr id="7" name="anim2_0_94"/>
           <p:cNvSpPr/>
           <p:nvPr/>
         </p:nvSpPr>
@@ -8476,7 +8581,7 @@
       </p:sp>
       <p:sp>
         <p:nvSpPr>
-          <p:cNvPr id="8" name="anim2_0_93"/>
+          <p:cNvPr id="8" name="anim2_0_94"/>
           <p:cNvSpPr/>
           <p:nvPr/>
         </p:nvSpPr>
@@ -8514,7 +8619,7 @@
       </p:sp>
       <p:sp>
         <p:nvSpPr>
-          <p:cNvPr id="9" name="anim2_0_93"/>
+          <p:cNvPr id="9" name="anim2_0_94"/>
           <p:cNvSpPr txBox="1"/>
           <p:nvPr/>
         </p:nvSpPr>
@@ -8564,7 +8669,7 @@
       </p:sp>
       <p:sp>
         <p:nvSpPr>
-          <p:cNvPr id="10" name="anim3_0_94"/>
+          <p:cNvPr id="10" name="anim3_0_95"/>
           <p:cNvSpPr/>
           <p:nvPr/>
         </p:nvSpPr>
@@ -8602,7 +8707,7 @@
       </p:sp>
       <p:sp>
         <p:nvSpPr>
-          <p:cNvPr id="11" name="anim3_0_94"/>
+          <p:cNvPr id="11" name="anim3_0_95"/>
           <p:cNvSpPr/>
           <p:nvPr/>
         </p:nvSpPr>
@@ -8640,7 +8745,7 @@
       </p:sp>
       <p:sp>
         <p:nvSpPr>
-          <p:cNvPr id="12" name="anim3_0_94"/>
+          <p:cNvPr id="12" name="anim3_0_95"/>
           <p:cNvSpPr txBox="1"/>
           <p:nvPr/>
         </p:nvSpPr>
@@ -9247,7 +9352,7 @@
       </p:sp>
       <p:pic>
         <p:nvPicPr>
-          <p:cNvPr id="3" name="anim1_0_95" descr="Customer call list">    </p:cNvPr>
+          <p:cNvPr id="3" name="anim1_0_96" descr="Customer call list">    </p:cNvPr>
           <p:cNvPicPr>
             <a:picLocks noChangeAspect="1"/>
           </p:cNvPicPr>
@@ -9271,7 +9376,7 @@
       </p:pic>
       <p:pic>
         <p:nvPicPr>
-          <p:cNvPr id="4" name="anim2_0_96" descr="Orders vs enquiries">    </p:cNvPr>
+          <p:cNvPr id="4" name="anim2_0_97" descr="Orders vs enquiries">    </p:cNvPr>
           <p:cNvPicPr>
             <a:picLocks noChangeAspect="1"/>
           </p:cNvPicPr>
@@ -9295,7 +9400,7 @@
       </p:pic>
       <p:sp>
         <p:nvSpPr>
-          <p:cNvPr id="5" name="anim1_1_97"/>
+          <p:cNvPr id="5" name="anim1_1_98"/>
           <p:cNvSpPr/>
           <p:nvPr/>
         </p:nvSpPr>
@@ -9349,7 +9454,7 @@
       </p:sp>
       <p:sp>
         <p:nvSpPr>
-          <p:cNvPr id="6" name="anim1_1_98"/>
+          <p:cNvPr id="6" name="anim1_1_99"/>
           <p:cNvSpPr/>
           <p:nvPr/>
         </p:nvSpPr>
@@ -9403,7 +9508,7 @@
       </p:sp>
       <p:sp>
         <p:nvSpPr>
-          <p:cNvPr id="7" name="anim1_1_99"/>
+          <p:cNvPr id="7" name="anim1_1_100"/>
           <p:cNvSpPr/>
           <p:nvPr/>
         </p:nvSpPr>
@@ -9457,7 +9562,7 @@
       </p:sp>
       <p:sp>
         <p:nvSpPr>
-          <p:cNvPr id="8" name="anim2_1_100"/>
+          <p:cNvPr id="8" name="anim2_1_101"/>
           <p:cNvSpPr/>
           <p:nvPr/>
         </p:nvSpPr>
@@ -9511,7 +9616,7 @@
       </p:sp>
       <p:sp>
         <p:nvSpPr>
-          <p:cNvPr id="9" name="anim2_1_101"/>
+          <p:cNvPr id="9" name="anim2_1_102"/>
           <p:cNvSpPr/>
           <p:nvPr/>
         </p:nvSpPr>
@@ -9565,7 +9670,7 @@
       </p:sp>
       <p:sp>
         <p:nvSpPr>
-          <p:cNvPr id="10" name="anim2_1_102"/>
+          <p:cNvPr id="10" name="anim2_1_103"/>
           <p:cNvSpPr/>
           <p:nvPr/>
         </p:nvSpPr>
@@ -9619,7 +9724,7 @@
       </p:sp>
       <p:sp>
         <p:nvSpPr>
-          <p:cNvPr id="11" name="anim1_1_103"/>
+          <p:cNvPr id="11" name="anim1_1_104"/>
           <p:cNvSpPr txBox="1"/>
           <p:nvPr/>
         </p:nvSpPr>
@@ -9655,7 +9760,7 @@
       </p:sp>
       <p:sp>
         <p:nvSpPr>
-          <p:cNvPr id="12" name="anim2_1_104"/>
+          <p:cNvPr id="12" name="anim2_1_105"/>
           <p:cNvSpPr txBox="1"/>
           <p:nvPr/>
         </p:nvSpPr>
@@ -10246,7 +10351,7 @@
       </p:sp>
       <p:sp>
         <p:nvSpPr>
-          <p:cNvPr id="3" name="ring_105"/>
+          <p:cNvPr id="3" name="ring_106"/>
           <p:cNvSpPr/>
           <p:nvPr/>
         </p:nvSpPr>
@@ -10270,7 +10375,7 @@
       </p:sp>
       <p:sp>
         <p:nvSpPr>
-          <p:cNvPr id="4" name="ring_106"/>
+          <p:cNvPr id="4" name="ring_107"/>
           <p:cNvSpPr/>
           <p:nvPr/>
         </p:nvSpPr>
@@ -10294,7 +10399,7 @@
       </p:sp>
       <p:pic>
         <p:nvPicPr>
-          <p:cNvPr id="5" name="circleimg_107" descr="Forecasting page">    </p:cNvPr>
+          <p:cNvPr id="5" name="circleimg_108" descr="Forecasting page">    </p:cNvPr>
           <p:cNvPicPr>
             <a:picLocks noChangeAspect="1"/>
           </p:cNvPicPr>
@@ -10318,7 +10423,7 @@
       </p:pic>
       <p:sp>
         <p:nvSpPr>
-          <p:cNvPr id="6" name="anim1_0_108"/>
+          <p:cNvPr id="6" name="anim1_0_109"/>
           <p:cNvSpPr/>
           <p:nvPr/>
         </p:nvSpPr>
@@ -10358,7 +10463,7 @@
       </p:sp>
       <p:sp>
         <p:nvSpPr>
-          <p:cNvPr id="7" name="anim1_0_108"/>
+          <p:cNvPr id="7" name="anim1_0_109"/>
           <p:cNvSpPr txBox="1"/>
           <p:nvPr/>
         </p:nvSpPr>
@@ -10394,7 +10499,7 @@
       </p:sp>
       <p:sp>
         <p:nvSpPr>
-          <p:cNvPr id="8" name="anim1_0_108"/>
+          <p:cNvPr id="8" name="anim1_0_109"/>
           <p:cNvSpPr/>
           <p:nvPr/>
         </p:nvSpPr>
@@ -10434,7 +10539,7 @@
       </p:sp>
       <p:sp>
         <p:nvSpPr>
-          <p:cNvPr id="9" name="anim2_0_109"/>
+          <p:cNvPr id="9" name="anim2_0_110"/>
           <p:cNvSpPr/>
           <p:nvPr/>
         </p:nvSpPr>
@@ -10474,7 +10579,7 @@
       </p:sp>
       <p:sp>
         <p:nvSpPr>
-          <p:cNvPr id="10" name="anim2_0_109"/>
+          <p:cNvPr id="10" name="anim2_0_110"/>
           <p:cNvSpPr txBox="1"/>
           <p:nvPr/>
         </p:nvSpPr>
@@ -10510,7 +10615,7 @@
       </p:sp>
       <p:sp>
         <p:nvSpPr>
-          <p:cNvPr id="11" name="anim2_0_109"/>
+          <p:cNvPr id="11" name="anim2_0_110"/>
           <p:cNvSpPr/>
           <p:nvPr/>
         </p:nvSpPr>
@@ -10550,7 +10655,7 @@
       </p:sp>
       <p:sp>
         <p:nvSpPr>
-          <p:cNvPr id="12" name="anim3_0_110"/>
+          <p:cNvPr id="12" name="anim3_0_111"/>
           <p:cNvSpPr/>
           <p:nvPr/>
         </p:nvSpPr>
@@ -10590,7 +10695,7 @@
       </p:sp>
       <p:sp>
         <p:nvSpPr>
-          <p:cNvPr id="13" name="anim3_0_110"/>
+          <p:cNvPr id="13" name="anim3_0_111"/>
           <p:cNvSpPr txBox="1"/>
           <p:nvPr/>
         </p:nvSpPr>
@@ -10626,7 +10731,7 @@
       </p:sp>
       <p:sp>
         <p:nvSpPr>
-          <p:cNvPr id="14" name="anim3_0_110"/>
+          <p:cNvPr id="14" name="anim3_0_111"/>
           <p:cNvSpPr/>
           <p:nvPr/>
         </p:nvSpPr>
@@ -11263,7 +11368,7 @@
       </p:sp>
       <p:sp>
         <p:nvSpPr>
-          <p:cNvPr id="4" name="pl_111"/>
+          <p:cNvPr id="4" name="pl_112"/>
           <p:cNvSpPr/>
           <p:nvPr/>
         </p:nvSpPr>
@@ -11286,7 +11391,7 @@
       </p:sp>
       <p:sp>
         <p:nvSpPr>
-          <p:cNvPr id="5" name="anim1_0_112"/>
+          <p:cNvPr id="5" name="anim1_0_113"/>
           <p:cNvSpPr/>
           <p:nvPr/>
         </p:nvSpPr>
@@ -11338,7 +11443,7 @@
       </p:sp>
       <p:sp>
         <p:nvSpPr>
-          <p:cNvPr id="6" name="anim1_0_112"/>
+          <p:cNvPr id="6" name="anim1_0_113"/>
           <p:cNvSpPr txBox="1"/>
           <p:nvPr/>
         </p:nvSpPr>
@@ -11374,7 +11479,7 @@
       </p:sp>
       <p:sp>
         <p:nvSpPr>
-          <p:cNvPr id="7" name="anim1_1_113"/>
+          <p:cNvPr id="7" name="anim1_1_114"/>
           <p:cNvSpPr/>
           <p:nvPr/>
         </p:nvSpPr>
@@ -11412,7 +11517,7 @@
       </p:sp>
       <p:sp>
         <p:nvSpPr>
-          <p:cNvPr id="8" name="anim1_1_113"/>
+          <p:cNvPr id="8" name="anim1_1_114"/>
           <p:cNvSpPr txBox="1"/>
           <p:nvPr/>
         </p:nvSpPr>
@@ -11448,7 +11553,7 @@
       </p:sp>
       <p:sp>
         <p:nvSpPr>
-          <p:cNvPr id="9" name="anim1_2_114"/>
+          <p:cNvPr id="9" name="anim1_2_115"/>
           <p:cNvSpPr/>
           <p:nvPr/>
         </p:nvSpPr>
@@ -11486,7 +11591,7 @@
       </p:sp>
       <p:sp>
         <p:nvSpPr>
-          <p:cNvPr id="10" name="anim1_2_114"/>
+          <p:cNvPr id="10" name="anim1_2_115"/>
           <p:cNvSpPr txBox="1"/>
           <p:nvPr/>
         </p:nvSpPr>
@@ -11522,7 +11627,7 @@
       </p:sp>
       <p:sp>
         <p:nvSpPr>
-          <p:cNvPr id="11" name="anim1_3_115"/>
+          <p:cNvPr id="11" name="anim1_3_116"/>
           <p:cNvSpPr/>
           <p:nvPr/>
         </p:nvSpPr>
@@ -11560,7 +11665,7 @@
       </p:sp>
       <p:sp>
         <p:nvSpPr>
-          <p:cNvPr id="12" name="anim1_3_115"/>
+          <p:cNvPr id="12" name="anim1_3_116"/>
           <p:cNvSpPr txBox="1"/>
           <p:nvPr/>
         </p:nvSpPr>
@@ -11596,7 +11701,7 @@
       </p:sp>
       <p:sp>
         <p:nvSpPr>
-          <p:cNvPr id="13" name="anim1_4_116"/>
+          <p:cNvPr id="13" name="anim1_4_117"/>
           <p:cNvSpPr/>
           <p:nvPr/>
         </p:nvSpPr>
@@ -11634,7 +11739,7 @@
       </p:sp>
       <p:sp>
         <p:nvSpPr>
-          <p:cNvPr id="14" name="anim1_4_116"/>
+          <p:cNvPr id="14" name="anim1_4_117"/>
           <p:cNvSpPr txBox="1"/>
           <p:nvPr/>
         </p:nvSpPr>
@@ -11670,7 +11775,7 @@
       </p:sp>
       <p:sp>
         <p:nvSpPr>
-          <p:cNvPr id="15" name="anim2_0_117"/>
+          <p:cNvPr id="15" name="anim2_0_118"/>
           <p:cNvSpPr txBox="1"/>
           <p:nvPr/>
         </p:nvSpPr>
@@ -12279,7 +12384,7 @@
       </p:grpSpPr>
       <p:sp>
         <p:nvSpPr>
-          <p:cNvPr id="2" name="dot_118"/>
+          <p:cNvPr id="2" name="dot_119"/>
           <p:cNvSpPr/>
           <p:nvPr/>
         </p:nvSpPr>
@@ -12407,7 +12512,7 @@
       </p:sp>
       <p:sp>
         <p:nvSpPr>
-          <p:cNvPr id="5" name="ring_119"/>
+          <p:cNvPr id="5" name="ring_120"/>
           <p:cNvSpPr/>
           <p:nvPr/>
         </p:nvSpPr>
@@ -12431,7 +12536,7 @@
       </p:sp>
       <p:sp>
         <p:nvSpPr>
-          <p:cNvPr id="6" name="ring_120"/>
+          <p:cNvPr id="6" name="ring_121"/>
           <p:cNvSpPr/>
           <p:nvPr/>
         </p:nvSpPr>
@@ -12455,7 +12560,7 @@
       </p:sp>
       <p:sp>
         <p:nvSpPr>
-          <p:cNvPr id="7" name="SHOT-06_121"/>
+          <p:cNvPr id="7" name="SHOT-06_122"/>
           <p:cNvSpPr/>
           <p:nvPr/>
         </p:nvSpPr>
@@ -13126,7 +13231,7 @@
       </p:sp>
       <p:sp>
         <p:nvSpPr>
-          <p:cNvPr id="3" name="anim1_0_122"/>
+          <p:cNvPr id="3" name="anim1_0_123"/>
           <p:cNvSpPr/>
           <p:nvPr/>
         </p:nvSpPr>
@@ -13167,7 +13272,7 @@
       </p:sp>
       <p:sp>
         <p:nvSpPr>
-          <p:cNvPr id="4" name="anim2_0_123"/>
+          <p:cNvPr id="4" name="anim2_0_124"/>
           <p:cNvSpPr/>
           <p:nvPr/>
         </p:nvSpPr>
@@ -13208,7 +13313,7 @@
       </p:sp>
       <p:sp>
         <p:nvSpPr>
-          <p:cNvPr id="5" name="anim1_1_124"/>
+          <p:cNvPr id="5" name="anim1_1_125"/>
           <p:cNvSpPr txBox="1"/>
           <p:nvPr/>
         </p:nvSpPr>
@@ -13258,7 +13363,7 @@
       </p:sp>
       <p:sp>
         <p:nvSpPr>
-          <p:cNvPr id="6" name="anim1_1_125"/>
+          <p:cNvPr id="6" name="anim1_1_126"/>
           <p:cNvSpPr/>
           <p:nvPr/>
         </p:nvSpPr>
@@ -13278,7 +13383,7 @@
       </p:sp>
       <p:sp>
         <p:nvSpPr>
-          <p:cNvPr id="7" name="anim1_1_126"/>
+          <p:cNvPr id="7" name="anim1_1_127"/>
           <p:cNvSpPr txBox="1"/>
           <p:nvPr/>
         </p:nvSpPr>
@@ -13328,7 +13433,7 @@
       </p:sp>
       <p:sp>
         <p:nvSpPr>
-          <p:cNvPr id="8" name="anim1_1_127"/>
+          <p:cNvPr id="8" name="anim1_1_128"/>
           <p:cNvSpPr/>
           <p:nvPr/>
         </p:nvSpPr>
@@ -13348,7 +13453,7 @@
       </p:sp>
       <p:sp>
         <p:nvSpPr>
-          <p:cNvPr id="9" name="anim1_1_128"/>
+          <p:cNvPr id="9" name="anim1_1_129"/>
           <p:cNvSpPr txBox="1"/>
           <p:nvPr/>
         </p:nvSpPr>
@@ -13398,7 +13503,7 @@
       </p:sp>
       <p:sp>
         <p:nvSpPr>
-          <p:cNvPr id="10" name="anim1_1_129"/>
+          <p:cNvPr id="10" name="anim1_1_130"/>
           <p:cNvSpPr/>
           <p:nvPr/>
         </p:nvSpPr>
@@ -13418,7 +13523,7 @@
       </p:sp>
       <p:sp>
         <p:nvSpPr>
-          <p:cNvPr id="11" name="anim1_1_130"/>
+          <p:cNvPr id="11" name="anim1_1_131"/>
           <p:cNvSpPr txBox="1"/>
           <p:nvPr/>
         </p:nvSpPr>
@@ -13468,7 +13573,7 @@
       </p:sp>
       <p:sp>
         <p:nvSpPr>
-          <p:cNvPr id="12" name="anim1_1_131"/>
+          <p:cNvPr id="12" name="anim1_1_132"/>
           <p:cNvSpPr/>
           <p:nvPr/>
         </p:nvSpPr>
@@ -13488,7 +13593,7 @@
       </p:sp>
       <p:sp>
         <p:nvSpPr>
-          <p:cNvPr id="13" name="anim2_1_132"/>
+          <p:cNvPr id="13" name="anim2_1_133"/>
           <p:cNvSpPr txBox="1"/>
           <p:nvPr/>
         </p:nvSpPr>
@@ -13538,7 +13643,7 @@
       </p:sp>
       <p:sp>
         <p:nvSpPr>
-          <p:cNvPr id="14" name="anim2_1_133"/>
+          <p:cNvPr id="14" name="anim2_1_134"/>
           <p:cNvSpPr/>
           <p:nvPr/>
         </p:nvSpPr>
@@ -13558,7 +13663,7 @@
       </p:sp>
       <p:sp>
         <p:nvSpPr>
-          <p:cNvPr id="15" name="anim2_1_134"/>
+          <p:cNvPr id="15" name="anim2_1_135"/>
           <p:cNvSpPr txBox="1"/>
           <p:nvPr/>
         </p:nvSpPr>
@@ -13608,7 +13713,7 @@
       </p:sp>
       <p:sp>
         <p:nvSpPr>
-          <p:cNvPr id="16" name="anim2_1_135"/>
+          <p:cNvPr id="16" name="anim2_1_136"/>
           <p:cNvSpPr/>
           <p:nvPr/>
         </p:nvSpPr>
@@ -13628,7 +13733,7 @@
       </p:sp>
       <p:sp>
         <p:nvSpPr>
-          <p:cNvPr id="17" name="anim2_1_136"/>
+          <p:cNvPr id="17" name="anim2_1_137"/>
           <p:cNvSpPr txBox="1"/>
           <p:nvPr/>
         </p:nvSpPr>
@@ -13678,7 +13783,7 @@
       </p:sp>
       <p:sp>
         <p:nvSpPr>
-          <p:cNvPr id="18" name="anim2_1_137"/>
+          <p:cNvPr id="18" name="anim2_1_138"/>
           <p:cNvSpPr/>
           <p:nvPr/>
         </p:nvSpPr>
@@ -13698,7 +13803,7 @@
       </p:sp>
       <p:sp>
         <p:nvSpPr>
-          <p:cNvPr id="19" name="anim2_1_138"/>
+          <p:cNvPr id="19" name="anim2_1_139"/>
           <p:cNvSpPr txBox="1"/>
           <p:nvPr/>
         </p:nvSpPr>
@@ -13748,7 +13853,7 @@
       </p:sp>
       <p:sp>
         <p:nvSpPr>
-          <p:cNvPr id="20" name="anim2_1_139"/>
+          <p:cNvPr id="20" name="anim2_1_140"/>
           <p:cNvSpPr/>
           <p:nvPr/>
         </p:nvSpPr>
@@ -13768,7 +13873,7 @@
       </p:sp>
       <p:sp>
         <p:nvSpPr>
-          <p:cNvPr id="21" name="anim3_0_140"/>
+          <p:cNvPr id="21" name="anim3_0_141"/>
           <p:cNvSpPr txBox="1"/>
           <p:nvPr/>
         </p:nvSpPr>
@@ -14725,7 +14830,7 @@
       </p:sp>
       <p:sp>
         <p:nvSpPr>
-          <p:cNvPr id="4" name="anim1_0_141"/>
+          <p:cNvPr id="4" name="anim1_0_142"/>
           <p:cNvSpPr/>
           <p:nvPr/>
         </p:nvSpPr>
@@ -14797,7 +14902,7 @@
       </p:sp>
       <p:sp>
         <p:nvSpPr>
-          <p:cNvPr id="5" name="anim1_0_141"/>
+          <p:cNvPr id="5" name="anim1_0_142"/>
           <p:cNvSpPr/>
           <p:nvPr/>
         </p:nvSpPr>
@@ -14835,7 +14940,7 @@
       </p:sp>
       <p:sp>
         <p:nvSpPr>
-          <p:cNvPr id="6" name="anim1_1_142"/>
+          <p:cNvPr id="6" name="anim1_1_143"/>
           <p:cNvSpPr/>
           <p:nvPr/>
         </p:nvSpPr>
@@ -14907,7 +15012,7 @@
       </p:sp>
       <p:sp>
         <p:nvSpPr>
-          <p:cNvPr id="7" name="anim1_1_142"/>
+          <p:cNvPr id="7" name="anim1_1_143"/>
           <p:cNvSpPr/>
           <p:nvPr/>
         </p:nvSpPr>
@@ -14945,7 +15050,7 @@
       </p:sp>
       <p:sp>
         <p:nvSpPr>
-          <p:cNvPr id="8" name="anim1_2_143"/>
+          <p:cNvPr id="8" name="anim1_2_144"/>
           <p:cNvSpPr/>
           <p:nvPr/>
         </p:nvSpPr>
@@ -15017,7 +15122,7 @@
       </p:sp>
       <p:sp>
         <p:nvSpPr>
-          <p:cNvPr id="9" name="anim1_2_143"/>
+          <p:cNvPr id="9" name="anim1_2_144"/>
           <p:cNvSpPr/>
           <p:nvPr/>
         </p:nvSpPr>
@@ -15055,7 +15160,7 @@
       </p:sp>
       <p:sp>
         <p:nvSpPr>
-          <p:cNvPr id="10" name="anim1_3_144"/>
+          <p:cNvPr id="10" name="anim1_3_145"/>
           <p:cNvSpPr/>
           <p:nvPr/>
         </p:nvSpPr>
@@ -15127,7 +15232,7 @@
       </p:sp>
       <p:sp>
         <p:nvSpPr>
-          <p:cNvPr id="11" name="anim1_3_144"/>
+          <p:cNvPr id="11" name="anim1_3_145"/>
           <p:cNvSpPr/>
           <p:nvPr/>
         </p:nvSpPr>
@@ -15165,7 +15270,7 @@
       </p:sp>
       <p:sp>
         <p:nvSpPr>
-          <p:cNvPr id="12" name="anim2_0_145"/>
+          <p:cNvPr id="12" name="anim2_0_146"/>
           <p:cNvSpPr txBox="1"/>
           <p:nvPr/>
         </p:nvSpPr>
@@ -15731,7 +15836,7 @@
       </p:sp>
       <p:sp>
         <p:nvSpPr>
-          <p:cNvPr id="3" name="rl_146"/>
+          <p:cNvPr id="3" name="rl_147"/>
           <p:cNvSpPr/>
           <p:nvPr/>
         </p:nvSpPr>
@@ -15754,7 +15859,7 @@
       </p:sp>
       <p:sp>
         <p:nvSpPr>
-          <p:cNvPr id="4" name="anim1_0_147"/>
+          <p:cNvPr id="4" name="anim1_0_148"/>
           <p:cNvSpPr/>
           <p:nvPr/>
         </p:nvSpPr>
@@ -15792,7 +15897,7 @@
       </p:sp>
       <p:sp>
         <p:nvSpPr>
-          <p:cNvPr id="5" name="anim1_0_147"/>
+          <p:cNvPr id="5" name="anim1_0_148"/>
           <p:cNvSpPr txBox="1"/>
           <p:nvPr/>
         </p:nvSpPr>
@@ -15853,7 +15958,7 @@
       </p:sp>
       <p:sp>
         <p:nvSpPr>
-          <p:cNvPr id="6" name="anim1_1_148"/>
+          <p:cNvPr id="6" name="anim1_1_149"/>
           <p:cNvSpPr/>
           <p:nvPr/>
         </p:nvSpPr>
@@ -15891,7 +15996,7 @@
       </p:sp>
       <p:sp>
         <p:nvSpPr>
-          <p:cNvPr id="7" name="anim1_1_148"/>
+          <p:cNvPr id="7" name="anim1_1_149"/>
           <p:cNvSpPr txBox="1"/>
           <p:nvPr/>
         </p:nvSpPr>
@@ -15952,7 +16057,7 @@
       </p:sp>
       <p:sp>
         <p:nvSpPr>
-          <p:cNvPr id="8" name="anim1_2_149"/>
+          <p:cNvPr id="8" name="anim1_2_150"/>
           <p:cNvSpPr/>
           <p:nvPr/>
         </p:nvSpPr>
@@ -15990,7 +16095,7 @@
       </p:sp>
       <p:sp>
         <p:nvSpPr>
-          <p:cNvPr id="9" name="anim1_2_149"/>
+          <p:cNvPr id="9" name="anim1_2_150"/>
           <p:cNvSpPr txBox="1"/>
           <p:nvPr/>
         </p:nvSpPr>
@@ -16071,7 +16176,7 @@
       </p:sp>
       <p:sp>
         <p:nvSpPr>
-          <p:cNvPr id="11" name="anim2_0_150"/>
+          <p:cNvPr id="11" name="anim2_0_151"/>
           <p:cNvSpPr/>
           <p:nvPr/>
         </p:nvSpPr>
@@ -16095,7 +16200,7 @@
       </p:sp>
       <p:sp>
         <p:nvSpPr>
-          <p:cNvPr id="12" name="anim2_0_151"/>
+          <p:cNvPr id="12" name="anim2_0_152"/>
           <p:cNvSpPr/>
           <p:nvPr/>
         </p:nvSpPr>
@@ -17553,7 +17658,7 @@
       </p:sp>
       <p:pic>
         <p:nvPicPr>
-          <p:cNvPr id="4" name="fc_152" descr="Forecasting page">    </p:cNvPr>
+          <p:cNvPr id="4" name="fc_153" descr="Forecasting page">    </p:cNvPr>
           <p:cNvPicPr>
             <a:picLocks noChangeAspect="1"/>
           </p:cNvPicPr>
@@ -19323,7 +19428,7 @@
       </p:sp>
       <p:pic>
         <p:nvPicPr>
-          <p:cNvPr id="3" name="flow_153" descr="Process flow from request to SAP B1 to regional insight">    </p:cNvPr>
+          <p:cNvPr id="3" name="flow_154" descr="Process flow from request to SAP B1 to regional insight">    </p:cNvPr>
           <p:cNvPicPr>
             <a:picLocks noChangeAspect="1"/>
           </p:cNvPicPr>
